--- a/outputs/ophthalmology-batch-20261011/strabismus/A6_color_editable.pptx
+++ b/outputs/ophthalmology-batch-20261011/strabismus/A6_color_editable.pptx
@@ -631,7 +631,7 @@
           <a:p/>
           <a:p>
             <a:r>
-              <a:t>strabismus-09 间歇外斜分型：基本型远近差&lt;10△；分开过强远&gt;近≥15△，遮盖一眼30～60 min仍大；集合不足近&gt;远≥15△；类似分开过强型遮盖后近角增大。</a:t>
+              <a:t>strabismus-09 间歇外斜分型：基本型远近差&lt;10△；分开过强型：远距斜视度较近距大，差值≥15△，遮盖一眼30～60 min仍大；集合不足型：近距斜视度较远距大，差值≥15△；类似分开过强型遮盖后近角增大。</a:t>
             </a:r>
           </a:p>
           <a:p>
@@ -4190,7 +4190,7 @@
       </p:sp>
       <p:sp>
         <p:nvSpPr>
-          <p:cNvPr id="7" name="病史、远近视力、儿童麻痹验光；眼位/运动及双眼视。先矫屈光、治弱视；急性内斜先排颅内病。"/>
+          <p:cNvPr id="7" name="病史、远近视力、儿童睫状肌麻痹验光；眼位/运动及双眼视。先矫屈光、治弱视；急性内斜先排颅内病。"/>
           <p:cNvSpPr txBox="1"/>
           <p:nvPr/>
         </p:nvSpPr>
@@ -4230,7 +4230,7 @@
                 <a:ea typeface="Microsoft YaHei"/>
                 <a:cs typeface="Microsoft YaHei"/>
               </a:rPr>
-              <a:t>病史、远近视力、儿童麻痹验光；眼位/运动及双眼视。先矫</a:t>
+              <a:t>病史、远近视力、儿童睫状肌麻痹验光；眼位/运动及双眼</a:t>
             </a:r>
           </a:p>
           <a:p>
@@ -4254,7 +4254,7 @@
                 <a:ea typeface="Microsoft YaHei"/>
                 <a:cs typeface="Microsoft YaHei"/>
               </a:rPr>
-              <a:t>屈光、治弱视；急性内斜先排颅内病。</a:t>
+              <a:t>视。先矫屈光、治弱视；急性内斜先排颅内病。</a:t>
             </a:r>
           </a:p>
         </p:txBody>
@@ -5708,7 +5708,7 @@
       </p:sp>
       <p:sp>
         <p:nvSpPr>
-          <p:cNvPr id="15" name="术后1天、1周、1月、3月、6月；后每6～12月，至视觉发育成熟。调节性内斜5岁前每6月验光，之后每"/>
+          <p:cNvPr id="15" name="术后1天、1周、1月、3月、6月；后每6～12个月，至视觉发育成熟。调节性内斜5岁前每6月验光，之后"/>
           <p:cNvSpPr txBox="1"/>
           <p:nvPr/>
         </p:nvSpPr>
@@ -5748,7 +5748,7 @@
                 <a:ea typeface="Microsoft YaHei"/>
                 <a:cs typeface="Microsoft YaHei"/>
               </a:rPr>
-              <a:t>术后1天、1周、1月、3月、6月；后每6～12月，至视觉发育</a:t>
+              <a:t>术后1天、1周、1月、3月、6月；后每6～12个月，至视觉发</a:t>
             </a:r>
           </a:p>
           <a:p>
@@ -5772,7 +5772,7 @@
                 <a:ea typeface="Microsoft YaHei"/>
                 <a:cs typeface="Microsoft YaHei"/>
               </a:rPr>
-              <a:t>成熟。调节性内斜5岁前每6月验光，之后每年。</a:t>
+              <a:t>育成熟。调节性内斜5岁前每6月验光，之后每年。</a:t>
             </a:r>
           </a:p>
         </p:txBody>
